--- a/Arquitectura de Sistemas Computacionales/Clases/Presentacion del Curso - Arquitectura de Sistemas Computacionales.pptx
+++ b/Arquitectura de Sistemas Computacionales/Clases/Presentacion del Curso - Arquitectura de Sistemas Computacionales.pptx
@@ -4704,7 +4704,7 @@
                 </a:solidFill>
                 <a:latin typeface="Calibri"/>
               </a:rPr>
-              <a:t>ExamLab</a:t>
+              <a:t>la plataforma del curso</a:t>
             </a:r>
           </a:p>
           <a:p>
@@ -7082,7 +7082,7 @@
                 </a:solidFill>
                 <a:latin typeface="Calibri"/>
               </a:rPr>
-              <a:t> (sin cloud de pago ni Docker Desktop). Talleres y quices/parciales se entregan/presentan en </a:t>
+              <a:t> (sin cloud de pago ni Docker Desktop). Talleres y quices/parciales se entregan y se presentan en </a:t>
             </a:r>
             <a:r>
               <a:rPr sz="2000" b="1" i="0">
@@ -7091,7 +7091,7 @@
                 </a:solidFill>
                 <a:latin typeface="Calibri"/>
               </a:rPr>
-              <a:t>ExamLab</a:t>
+              <a:t>la plataforma del curso</a:t>
             </a:r>
             <a:r>
               <a:rPr sz="2000" b="0" i="0">
@@ -7100,7 +7100,7 @@
                 </a:solidFill>
                 <a:latin typeface="Calibri"/>
               </a:rPr>
-              <a:t> (https://uniaj.examlab.workers.dev/) — no es la plataforma oficial de la UNIAJC, la usamos solo para esto.</a:t>
+              <a:t> — no es la plataforma oficial de la UNIAJC, la usamos solo para esto; la dirección y tus datos de acceso llegan en el correo de bienvenida.</a:t>
             </a:r>
           </a:p>
           <a:p>
